--- a/szubp_prezentacija_prvi_deo.pptx
+++ b/szubp_prezentacija_prvi_deo.pptx
@@ -40,20 +40,16 @@
       <p:regular r:id="rId26"/>
     </p:embeddedFont>
     <p:embeddedFont>
-      <p:font typeface="Calibri (MS) Bold Italics" charset="1" panose="020F07020304040A0204"/>
+      <p:font typeface="Courier New" charset="1" panose="02070309020205020404"/>
       <p:regular r:id="rId27"/>
     </p:embeddedFont>
     <p:embeddedFont>
-      <p:font typeface="Courier New" charset="1" panose="02070309020205020404"/>
+      <p:font typeface="Noto Sans" charset="1" panose="020B0502040504020204"/>
       <p:regular r:id="rId28"/>
     </p:embeddedFont>
     <p:embeddedFont>
-      <p:font typeface="Noto Sans" charset="1" panose="020B0502040504020204"/>
+      <p:font typeface="Courier New Bold" charset="1" panose="02070609020205020404"/>
       <p:regular r:id="rId29"/>
-    </p:embeddedFont>
-    <p:embeddedFont>
-      <p:font typeface="Courier New Bold" charset="1" panose="02070609020205020404"/>
-      <p:regular r:id="rId30"/>
     </p:embeddedFont>
   </p:embeddedFontLst>
   <p:defaultTextStyle>
@@ -4536,7 +4532,7 @@
         <p:spPr>
           <a:xfrm rot="0">
             <a:off x="786384" y="6244495"/>
-            <a:ext cx="7816729" cy="1281827"/>
+            <a:ext cx="7816729" cy="1668831"/>
           </a:xfrm>
           <a:prstGeom prst="rect">
             <a:avLst/>
@@ -4589,7 +4585,45 @@
                 <a:cs typeface="Calibri (MS)"/>
                 <a:sym typeface="Calibri (MS)"/>
               </a:rPr>
-              <a:t>shared_buffers = 25% RAM. Indeksi na svim kolonama koje se cesto pretražuju. Cilj: hit rate &gt; 99%.</a:t>
+              <a:t>shared_buffers = 25% RAM. </a:t>
+            </a:r>
+          </a:p>
+          <a:p>
+            <a:pPr algn="l">
+              <a:lnSpc>
+                <a:spcPts val="2624"/>
+              </a:lnSpc>
+            </a:pPr>
+            <a:r>
+              <a:rPr lang="en-US" sz="2199">
+                <a:solidFill>
+                  <a:srgbClr val="E8F4F8"/>
+                </a:solidFill>
+                <a:latin typeface="Calibri (MS)"/>
+                <a:ea typeface="Calibri (MS)"/>
+                <a:cs typeface="Calibri (MS)"/>
+                <a:sym typeface="Calibri (MS)"/>
+              </a:rPr>
+              <a:t>Indeksi na svim kolonama koje se često pretražuju. </a:t>
+            </a:r>
+          </a:p>
+          <a:p>
+            <a:pPr algn="l">
+              <a:lnSpc>
+                <a:spcPts val="2624"/>
+              </a:lnSpc>
+            </a:pPr>
+            <a:r>
+              <a:rPr lang="en-US" sz="2199">
+                <a:solidFill>
+                  <a:srgbClr val="E8F4F8"/>
+                </a:solidFill>
+                <a:latin typeface="Calibri (MS)"/>
+                <a:ea typeface="Calibri (MS)"/>
+                <a:cs typeface="Calibri (MS)"/>
+                <a:sym typeface="Calibri (MS)"/>
+              </a:rPr>
+              <a:t>Cilj: hit rate &gt; 99%.</a:t>
             </a:r>
           </a:p>
         </p:txBody>
@@ -4603,7 +4637,7 @@
         <p:spPr>
           <a:xfrm rot="0">
             <a:off x="9747504" y="4466749"/>
-            <a:ext cx="7702639" cy="3269123"/>
+            <a:ext cx="7702639" cy="3155381"/>
           </a:xfrm>
           <a:prstGeom prst="rect">
             <a:avLst/>
@@ -4649,7 +4683,7 @@
                 <a:cs typeface="Calibri (MS)"/>
                 <a:sym typeface="Calibri (MS)"/>
               </a:rPr>
-              <a:t>Teže postići visok hit ratio — radni skup moze biti veci od</a:t>
+              <a:t>Teže postići visok hit ratio — radni skup moze biti veći od</a:t>
             </a:r>
           </a:p>
           <a:p>
@@ -4843,8 +4877,8 @@
         </p:nvSpPr>
         <p:spPr>
           <a:xfrm rot="0">
-            <a:off x="731520" y="9046397"/>
-            <a:ext cx="17372152" cy="702269"/>
+            <a:off x="731520" y="8864079"/>
+            <a:ext cx="17027686" cy="1021131"/>
           </a:xfrm>
           <a:prstGeom prst="rect">
             <a:avLst/>
@@ -6185,7 +6219,7 @@
         <p:spPr>
           <a:xfrm rot="0">
             <a:off x="731520" y="4100789"/>
-            <a:ext cx="5829681" cy="702269"/>
+            <a:ext cx="5829681" cy="697281"/>
           </a:xfrm>
           <a:prstGeom prst="rect">
             <a:avLst/>
@@ -6212,7 +6246,7 @@
                 <a:cs typeface="Calibri (MS)"/>
                 <a:sym typeface="Calibri (MS)"/>
               </a:rPr>
-              <a:t>diskread≈0pricoldcache|warmlakodostižan | razlika minimalna</a:t>
+              <a:t>diskread≈0 pri cold cache|warm lako dostižan | razlika minimalna</a:t>
             </a:r>
           </a:p>
         </p:txBody>
@@ -6226,7 +6260,7 @@
         <p:spPr>
           <a:xfrm rot="0">
             <a:off x="731520" y="5603272"/>
-            <a:ext cx="6704390" cy="406994"/>
+            <a:ext cx="6257627" cy="420376"/>
           </a:xfrm>
           <a:prstGeom prst="rect">
             <a:avLst/>
@@ -6253,7 +6287,7 @@
                 <a:cs typeface="Calibri (MS)"/>
                 <a:sym typeface="Calibri (MS)"/>
               </a:rPr>
-              <a:t>cold cache: 25.792 diskread,203ms|warmcache: 0 disk</a:t>
+              <a:t>cold cache: 25.792 diskread,203ms|warm cache: 0 disk</a:t>
             </a:r>
           </a:p>
         </p:txBody>
@@ -6308,7 +6342,7 @@
         <p:spPr>
           <a:xfrm rot="0">
             <a:off x="685800" y="7039061"/>
-            <a:ext cx="7205396" cy="406994"/>
+            <a:ext cx="7001470" cy="420376"/>
           </a:xfrm>
           <a:prstGeom prst="rect">
             <a:avLst/>
@@ -6335,7 +6369,7 @@
                 <a:cs typeface="Calibri (MS)"/>
                 <a:sym typeface="Calibri (MS)"/>
               </a:rPr>
-              <a:t>Stranice ucitaneSeqScan-ommogu biti izbacene pre ponovne</a:t>
+              <a:t>Stranice učitane SeqScan-om mogu biti izbačene pre ponovne</a:t>
             </a:r>
           </a:p>
         </p:txBody>
@@ -6390,7 +6424,7 @@
         <p:spPr>
           <a:xfrm rot="0">
             <a:off x="685800" y="8566747"/>
-            <a:ext cx="9662141" cy="406994"/>
+            <a:ext cx="9410254" cy="420376"/>
           </a:xfrm>
           <a:prstGeom prst="rect">
             <a:avLst/>
@@ -6417,7 +6451,7 @@
                 <a:cs typeface="Calibri (MS)"/>
                 <a:sym typeface="Calibri (MS)"/>
               </a:rPr>
-              <a:t>Pocetnavrednost:25%RAM-a. Dedikovan server: do 40%. Promena zahteva restart</a:t>
+              <a:t>Početna vrednost:25% RAM-a. Dedikovan server: do 40%. Promena zahteva restart</a:t>
             </a:r>
           </a:p>
         </p:txBody>
@@ -11059,7 +11093,7 @@
         <p:spPr>
           <a:xfrm rot="0">
             <a:off x="457200" y="9305182"/>
-            <a:ext cx="17024156" cy="702278"/>
+            <a:ext cx="17024156" cy="373431"/>
           </a:xfrm>
           <a:prstGeom prst="rect">
             <a:avLst/>
@@ -11076,18 +11110,6 @@
                 <a:spcPts val="2624"/>
               </a:lnSpc>
             </a:pPr>
-            <a:r>
-              <a:rPr lang="en-US" sz="2199" i="true">
-                <a:solidFill>
-                  <a:srgbClr val="8BA8BE"/>
-                </a:solidFill>
-                <a:latin typeface="Calibri (MS) Italics"/>
-                <a:ea typeface="Calibri (MS) Italics"/>
-                <a:cs typeface="Calibri (MS) Italics"/>
-                <a:sym typeface="Calibri (MS) Italics"/>
-              </a:rPr>
-              <a:t> value &lt; 200 (Bitmap) ima više shared read (66) nego value &lt; 800 (Seq Scan, 0). Bitmap pristupa nasumičnim blokovima po celoj tabeli, dok Seq Scan koristi podatke koji su već u kešu iz prethodnih testova.</a:t>
-            </a:r>
           </a:p>
         </p:txBody>
       </p:sp>
@@ -13737,47 +13759,6 @@
           </a:p>
         </p:txBody>
       </p:sp>
-      <p:sp>
-        <p:nvSpPr>
-          <p:cNvPr name="TextBox 44" id="44"/>
-          <p:cNvSpPr txBox="true"/>
-          <p:nvPr/>
-        </p:nvSpPr>
-        <p:spPr>
-          <a:xfrm rot="0">
-            <a:off x="457200" y="9305182"/>
-            <a:ext cx="17304868" cy="702278"/>
-          </a:xfrm>
-          <a:prstGeom prst="rect">
-            <a:avLst/>
-          </a:prstGeom>
-        </p:spPr>
-        <p:txBody>
-          <a:bodyPr anchor="t" rtlCol="false" tIns="0" lIns="0" bIns="0" rIns="0">
-            <a:spAutoFit/>
-          </a:bodyPr>
-          <a:lstStyle/>
-          <a:p>
-            <a:pPr algn="l">
-              <a:lnSpc>
-                <a:spcPts val="2624"/>
-              </a:lnSpc>
-            </a:pPr>
-            <a:r>
-              <a:rPr lang="en-US" sz="2199" i="true">
-                <a:solidFill>
-                  <a:srgbClr val="8BA8BE"/>
-                </a:solidFill>
-                <a:latin typeface="Calibri (MS) Italics"/>
-                <a:ea typeface="Calibri (MS) Italics"/>
-                <a:cs typeface="Calibri (MS) Italics"/>
-                <a:sym typeface="Calibri (MS) Italics"/>
-              </a:rPr>
-              <a:t> Granica efikasnosti indeksa: pri &gt;20% tabele, Bitmap Scan postaje skuplji od Seq Scan. Na velikoj bazi (287MB &gt; shared_buffers), cold cache drasticno pojacava razliku — hit rate pada na 2.5% pri value &lt; 200.</a:t>
-            </a:r>
-          </a:p>
-        </p:txBody>
-      </p:sp>
     </p:spTree>
   </p:cSld>
   <p:clrMapOvr>
@@ -18577,7 +18558,7 @@
         <p:spPr>
           <a:xfrm rot="0">
             <a:off x="731520" y="1570806"/>
-            <a:ext cx="4339333" cy="983523"/>
+            <a:ext cx="4339333" cy="1043311"/>
           </a:xfrm>
           <a:prstGeom prst="rect">
             <a:avLst/>
@@ -18623,7 +18604,7 @@
                 <a:cs typeface="Calibri (MS) Bold"/>
                 <a:sym typeface="Calibri (MS) Bold"/>
               </a:rPr>
-              <a:t>Uvod — zašto je disk I/O problem</a:t>
+              <a:t>Uvod</a:t>
             </a:r>
           </a:p>
         </p:txBody>
@@ -19940,7 +19921,7 @@
         <p:spPr>
           <a:xfrm rot="0">
             <a:off x="731520" y="7631735"/>
-            <a:ext cx="4011406" cy="377752"/>
+            <a:ext cx="3817144" cy="387363"/>
           </a:xfrm>
           <a:prstGeom prst="rect">
             <a:avLst/>
@@ -19967,7 +19948,7 @@
                 <a:cs typeface="Calibri (MS)"/>
                 <a:sym typeface="Calibri (MS)"/>
               </a:rPr>
-              <a:t>Cachelookup,pin,dirtypage, eviction</a:t>
+              <a:t>Cachelookup, pin, dirtypage, eviction</a:t>
             </a:r>
           </a:p>
         </p:txBody>
@@ -19980,8 +19961,8 @@
         </p:nvSpPr>
         <p:spPr>
           <a:xfrm rot="0">
-            <a:off x="731520" y="5930951"/>
-            <a:ext cx="5056803" cy="377752"/>
+            <a:off x="741045" y="5930951"/>
+            <a:ext cx="4956572" cy="387363"/>
           </a:xfrm>
           <a:prstGeom prst="rect">
             <a:avLst/>
@@ -20008,7 +19989,7 @@
                 <a:cs typeface="Calibri (MS)"/>
                 <a:sym typeface="Calibri (MS)"/>
               </a:rPr>
-              <a:t>Koncepti,cache hit/miss, memorijska hijerarhija</a:t>
+              <a:t>Koncepti, cache hit/miss, memorijska hijerarhija</a:t>
             </a:r>
           </a:p>
         </p:txBody>
@@ -20183,7 +20164,7 @@
         <p:spPr>
           <a:xfrm rot="0">
             <a:off x="9747504" y="4230167"/>
-            <a:ext cx="5171618" cy="377752"/>
+            <a:ext cx="5011638" cy="387363"/>
           </a:xfrm>
           <a:prstGeom prst="rect">
             <a:avLst/>
@@ -20210,7 +20191,7 @@
                 <a:cs typeface="Calibri (MS)"/>
                 <a:sym typeface="Calibri (MS)"/>
               </a:rPr>
-              <a:t>Mala i velikabaza,SeqScan,Bitmap, selektivnost</a:t>
+              <a:t>Mala i velika baza, SeqScan, Bitmap, selektivnost</a:t>
             </a:r>
           </a:p>
         </p:txBody>
@@ -20224,7 +20205,7 @@
         <p:spPr>
           <a:xfrm rot="0">
             <a:off x="9747504" y="2529383"/>
-            <a:ext cx="5403923" cy="377752"/>
+            <a:ext cx="5239345" cy="387363"/>
           </a:xfrm>
           <a:prstGeom prst="rect">
             <a:avLst/>
@@ -20251,7 +20232,7 @@
                 <a:cs typeface="Calibri (MS)"/>
                 <a:sym typeface="Calibri (MS)"/>
               </a:rPr>
-              <a:t>Hijerarhija,PlanCache,pg_prewarm, OLTP vs OLAP</a:t>
+              <a:t>Hijerarhija, PlanCache, pg_prewarm, OLTP vs OLAP</a:t>
             </a:r>
           </a:p>
         </p:txBody>
@@ -23878,8 +23859,8 @@
         </p:nvSpPr>
         <p:spPr>
           <a:xfrm rot="0">
-            <a:off x="9326880" y="2311870"/>
-            <a:ext cx="7777629" cy="702269"/>
+            <a:off x="9248592" y="2205292"/>
+            <a:ext cx="7777629" cy="1021131"/>
           </a:xfrm>
           <a:prstGeom prst="rect">
             <a:avLst/>
@@ -23906,7 +23887,26 @@
                 <a:cs typeface="Calibri (MS)"/>
                 <a:sym typeface="Calibri (MS)"/>
               </a:rPr>
-              <a:t>Heap storage: redovi se smeštaju u prvi slobodan prostor, bez sortiranja. Brzo umetanje, ali potrebni indeksi za efikasnu pretragu.</a:t>
+              <a:t>Heap storage: redovi se smeštaju u prvi slobodan prostor, bez sortiranja. </a:t>
+            </a:r>
+          </a:p>
+          <a:p>
+            <a:pPr algn="l">
+              <a:lnSpc>
+                <a:spcPts val="2624"/>
+              </a:lnSpc>
+            </a:pPr>
+            <a:r>
+              <a:rPr lang="en-US" sz="2199">
+                <a:solidFill>
+                  <a:srgbClr val="E8F4F8"/>
+                </a:solidFill>
+                <a:latin typeface="Calibri (MS)"/>
+                <a:ea typeface="Calibri (MS)"/>
+                <a:cs typeface="Calibri (MS)"/>
+                <a:sym typeface="Calibri (MS)"/>
+              </a:rPr>
+              <a:t>Brzo umetanje, ali potrebni indeksi za efikasnu pretragu.</a:t>
             </a:r>
           </a:p>
         </p:txBody>
@@ -25508,8 +25508,8 @@
         </p:nvSpPr>
         <p:spPr>
           <a:xfrm rot="0">
-            <a:off x="548640" y="9407366"/>
-            <a:ext cx="7283301" cy="406994"/>
+            <a:off x="12080938" y="3428143"/>
+            <a:ext cx="1283341" cy="406994"/>
           </a:xfrm>
           <a:prstGeom prst="rect">
             <a:avLst/>
@@ -25527,16 +25527,16 @@
               </a:lnSpc>
             </a:pPr>
             <a:r>
-              <a:rPr lang="en-US" b="true" sz="2199" i="true">
-                <a:solidFill>
-                  <a:srgbClr val="06D6A0"/>
-                </a:solidFill>
-                <a:latin typeface="Calibri (MS) Bold Italics"/>
-                <a:ea typeface="Calibri (MS) Bold Italics"/>
-                <a:cs typeface="Calibri (MS) Bold Italics"/>
-                <a:sym typeface="Calibri (MS) Bold Italics"/>
-              </a:rPr>
-              <a:t>Buffer Hit Ratio iz naših testova: 99.2% (cold) → 100% (warm)</a:t>
+              <a:rPr lang="en-US" b="true" sz="2199">
+                <a:solidFill>
+                  <a:srgbClr val="00B4D8"/>
+                </a:solidFill>
+                <a:latin typeface="Calibri (MS) Bold"/>
+                <a:ea typeface="Calibri (MS) Bold"/>
+                <a:cs typeface="Calibri (MS) Bold"/>
+                <a:sym typeface="Calibri (MS) Bold"/>
+              </a:rPr>
+              <a:t>Page Table</a:t>
             </a:r>
           </a:p>
         </p:txBody>
@@ -25549,8 +25549,8 @@
         </p:nvSpPr>
         <p:spPr>
           <a:xfrm rot="0">
-            <a:off x="12080938" y="3428143"/>
-            <a:ext cx="1283341" cy="406994"/>
+            <a:off x="11247120" y="4152138"/>
+            <a:ext cx="2098891" cy="318106"/>
           </a:xfrm>
           <a:prstGeom prst="rect">
             <a:avLst/>
@@ -25564,34 +25564,444 @@
           <a:p>
             <a:pPr algn="l">
               <a:lnSpc>
-                <a:spcPts val="3079"/>
-              </a:lnSpc>
-            </a:pPr>
-            <a:r>
-              <a:rPr lang="en-US" b="true" sz="2199">
+                <a:spcPts val="2520"/>
+              </a:lnSpc>
+            </a:pPr>
+            <a:r>
+              <a:rPr lang="en-US" sz="1800">
+                <a:solidFill>
+                  <a:srgbClr val="8BA8BE"/>
+                </a:solidFill>
+                <a:latin typeface="Courier New"/>
+                <a:ea typeface="Courier New"/>
+                <a:cs typeface="Courier New"/>
+                <a:sym typeface="Courier New"/>
+              </a:rPr>
+              <a:t>Page ID → Frame</a:t>
+            </a:r>
+          </a:p>
+        </p:txBody>
+      </p:sp>
+      <p:sp>
+        <p:nvSpPr>
+          <p:cNvPr name="TextBox 43" id="43"/>
+          <p:cNvSpPr txBox="true"/>
+          <p:nvPr/>
+        </p:nvSpPr>
+        <p:spPr>
+          <a:xfrm rot="0">
+            <a:off x="11247120" y="4700778"/>
+            <a:ext cx="2238813" cy="318106"/>
+          </a:xfrm>
+          <a:prstGeom prst="rect">
+            <a:avLst/>
+          </a:prstGeom>
+        </p:spPr>
+        <p:txBody>
+          <a:bodyPr anchor="t" rtlCol="false" tIns="0" lIns="0" bIns="0" rIns="0">
+            <a:spAutoFit/>
+          </a:bodyPr>
+          <a:lstStyle/>
+          <a:p>
+            <a:pPr algn="l">
+              <a:lnSpc>
+                <a:spcPts val="2520"/>
+              </a:lnSpc>
+            </a:pPr>
+            <a:r>
+              <a:rPr lang="en-US" sz="1800">
+                <a:solidFill>
+                  <a:srgbClr val="FFFFFF"/>
+                </a:solidFill>
+                <a:latin typeface="Courier New"/>
+                <a:ea typeface="Courier New"/>
+                <a:cs typeface="Courier New"/>
+                <a:sym typeface="Courier New"/>
+              </a:rPr>
+              <a:t>customers/0 → F3</a:t>
+            </a:r>
+          </a:p>
+        </p:txBody>
+      </p:sp>
+      <p:sp>
+        <p:nvSpPr>
+          <p:cNvPr name="TextBox 44" id="44"/>
+          <p:cNvSpPr txBox="true"/>
+          <p:nvPr/>
+        </p:nvSpPr>
+        <p:spPr>
+          <a:xfrm rot="0">
+            <a:off x="11247120" y="5249418"/>
+            <a:ext cx="1819037" cy="318106"/>
+          </a:xfrm>
+          <a:prstGeom prst="rect">
+            <a:avLst/>
+          </a:prstGeom>
+        </p:spPr>
+        <p:txBody>
+          <a:bodyPr anchor="t" rtlCol="false" tIns="0" lIns="0" bIns="0" rIns="0">
+            <a:spAutoFit/>
+          </a:bodyPr>
+          <a:lstStyle/>
+          <a:p>
+            <a:pPr algn="l">
+              <a:lnSpc>
+                <a:spcPts val="2520"/>
+              </a:lnSpc>
+            </a:pPr>
+            <a:r>
+              <a:rPr lang="en-US" sz="1800">
+                <a:solidFill>
+                  <a:srgbClr val="FFFFFF"/>
+                </a:solidFill>
+                <a:latin typeface="Courier New"/>
+                <a:ea typeface="Courier New"/>
+                <a:cs typeface="Courier New"/>
+                <a:sym typeface="Courier New"/>
+              </a:rPr>
+              <a:t>orders/0 → F1</a:t>
+            </a:r>
+          </a:p>
+        </p:txBody>
+      </p:sp>
+      <p:sp>
+        <p:nvSpPr>
+          <p:cNvPr name="TextBox 45" id="45"/>
+          <p:cNvSpPr txBox="true"/>
+          <p:nvPr/>
+        </p:nvSpPr>
+        <p:spPr>
+          <a:xfrm rot="0">
+            <a:off x="11247120" y="5798058"/>
+            <a:ext cx="1958969" cy="318106"/>
+          </a:xfrm>
+          <a:prstGeom prst="rect">
+            <a:avLst/>
+          </a:prstGeom>
+        </p:spPr>
+        <p:txBody>
+          <a:bodyPr anchor="t" rtlCol="false" tIns="0" lIns="0" bIns="0" rIns="0">
+            <a:spAutoFit/>
+          </a:bodyPr>
+          <a:lstStyle/>
+          <a:p>
+            <a:pPr algn="l">
+              <a:lnSpc>
+                <a:spcPts val="2520"/>
+              </a:lnSpc>
+            </a:pPr>
+            <a:r>
+              <a:rPr lang="en-US" sz="1800">
+                <a:solidFill>
+                  <a:srgbClr val="FFFFFF"/>
+                </a:solidFill>
+                <a:latin typeface="Courier New"/>
+                <a:ea typeface="Courier New"/>
+                <a:cs typeface="Courier New"/>
+                <a:sym typeface="Courier New"/>
+              </a:rPr>
+              <a:t>orders/1 → F12</a:t>
+            </a:r>
+          </a:p>
+        </p:txBody>
+      </p:sp>
+      <p:sp>
+        <p:nvSpPr>
+          <p:cNvPr name="TextBox 46" id="46"/>
+          <p:cNvSpPr txBox="true"/>
+          <p:nvPr/>
+        </p:nvSpPr>
+        <p:spPr>
+          <a:xfrm rot="0">
+            <a:off x="14721840" y="8795004"/>
+            <a:ext cx="559708" cy="318106"/>
+          </a:xfrm>
+          <a:prstGeom prst="rect">
+            <a:avLst/>
+          </a:prstGeom>
+        </p:spPr>
+        <p:txBody>
+          <a:bodyPr anchor="t" rtlCol="false" tIns="0" lIns="0" bIns="0" rIns="0">
+            <a:spAutoFit/>
+          </a:bodyPr>
+          <a:lstStyle/>
+          <a:p>
+            <a:pPr algn="l">
+              <a:lnSpc>
+                <a:spcPts val="2520"/>
+              </a:lnSpc>
+            </a:pPr>
+            <a:r>
+              <a:rPr lang="en-US" sz="1800">
+                <a:solidFill>
+                  <a:srgbClr val="8BA8BE"/>
+                </a:solidFill>
+                <a:latin typeface="Courier New"/>
+                <a:ea typeface="Courier New"/>
+                <a:cs typeface="Courier New"/>
+                <a:sym typeface="Courier New"/>
+              </a:rPr>
+              <a:t>FREE</a:t>
+            </a:r>
+          </a:p>
+        </p:txBody>
+      </p:sp>
+      <p:sp>
+        <p:nvSpPr>
+          <p:cNvPr name="TextBox 47" id="47"/>
+          <p:cNvSpPr txBox="true"/>
+          <p:nvPr/>
+        </p:nvSpPr>
+        <p:spPr>
+          <a:xfrm rot="0">
+            <a:off x="14721840" y="3966972"/>
+            <a:ext cx="1119407" cy="318106"/>
+          </a:xfrm>
+          <a:prstGeom prst="rect">
+            <a:avLst/>
+          </a:prstGeom>
+        </p:spPr>
+        <p:txBody>
+          <a:bodyPr anchor="t" rtlCol="false" tIns="0" lIns="0" bIns="0" rIns="0">
+            <a:spAutoFit/>
+          </a:bodyPr>
+          <a:lstStyle/>
+          <a:p>
+            <a:pPr algn="l">
+              <a:lnSpc>
+                <a:spcPts val="2520"/>
+              </a:lnSpc>
+            </a:pPr>
+            <a:r>
+              <a:rPr lang="en-US" sz="1800">
                 <a:solidFill>
                   <a:srgbClr val="00B4D8"/>
+                </a:solidFill>
+                <a:latin typeface="Courier New"/>
+                <a:ea typeface="Courier New"/>
+                <a:cs typeface="Courier New"/>
+                <a:sym typeface="Courier New"/>
+              </a:rPr>
+              <a:t>orders/0</a:t>
+            </a:r>
+          </a:p>
+        </p:txBody>
+      </p:sp>
+      <p:sp>
+        <p:nvSpPr>
+          <p:cNvPr name="TextBox 48" id="48"/>
+          <p:cNvSpPr txBox="true"/>
+          <p:nvPr/>
+        </p:nvSpPr>
+        <p:spPr>
+          <a:xfrm rot="0">
+            <a:off x="14721840" y="7185660"/>
+            <a:ext cx="1119407" cy="318106"/>
+          </a:xfrm>
+          <a:prstGeom prst="rect">
+            <a:avLst/>
+          </a:prstGeom>
+        </p:spPr>
+        <p:txBody>
+          <a:bodyPr anchor="t" rtlCol="false" tIns="0" lIns="0" bIns="0" rIns="0">
+            <a:spAutoFit/>
+          </a:bodyPr>
+          <a:lstStyle/>
+          <a:p>
+            <a:pPr algn="l">
+              <a:lnSpc>
+                <a:spcPts val="2520"/>
+              </a:lnSpc>
+            </a:pPr>
+            <a:r>
+              <a:rPr lang="en-US" sz="1800">
+                <a:solidFill>
+                  <a:srgbClr val="00B4D8"/>
+                </a:solidFill>
+                <a:latin typeface="Courier New"/>
+                <a:ea typeface="Courier New"/>
+                <a:cs typeface="Courier New"/>
+                <a:sym typeface="Courier New"/>
+              </a:rPr>
+              <a:t>orders/1</a:t>
+            </a:r>
+          </a:p>
+        </p:txBody>
+      </p:sp>
+      <p:sp>
+        <p:nvSpPr>
+          <p:cNvPr name="TextBox 49" id="49"/>
+          <p:cNvSpPr txBox="true"/>
+          <p:nvPr/>
+        </p:nvSpPr>
+        <p:spPr>
+          <a:xfrm rot="0">
+            <a:off x="15268004" y="7447483"/>
+            <a:ext cx="159258" cy="312144"/>
+          </a:xfrm>
+          <a:prstGeom prst="rect">
+            <a:avLst/>
+          </a:prstGeom>
+        </p:spPr>
+        <p:txBody>
+          <a:bodyPr anchor="t" rtlCol="false" tIns="0" lIns="0" bIns="0" rIns="0">
+            <a:spAutoFit/>
+          </a:bodyPr>
+          <a:lstStyle/>
+          <a:p>
+            <a:pPr algn="l">
+              <a:lnSpc>
+                <a:spcPts val="2520"/>
+              </a:lnSpc>
+            </a:pPr>
+            <a:r>
+              <a:rPr lang="en-US" sz="1800">
+                <a:solidFill>
+                  <a:srgbClr val="FFD166"/>
+                </a:solidFill>
+                <a:latin typeface="Noto Sans"/>
+                <a:ea typeface="Noto Sans"/>
+                <a:cs typeface="Noto Sans"/>
+                <a:sym typeface="Noto Sans"/>
+              </a:rPr>
+              <a:t>✓</a:t>
+            </a:r>
+          </a:p>
+        </p:txBody>
+      </p:sp>
+      <p:sp>
+        <p:nvSpPr>
+          <p:cNvPr name="TextBox 50" id="50"/>
+          <p:cNvSpPr txBox="true"/>
+          <p:nvPr/>
+        </p:nvSpPr>
+        <p:spPr>
+          <a:xfrm rot="0">
+            <a:off x="14721840" y="5576316"/>
+            <a:ext cx="1539183" cy="318106"/>
+          </a:xfrm>
+          <a:prstGeom prst="rect">
+            <a:avLst/>
+          </a:prstGeom>
+        </p:spPr>
+        <p:txBody>
+          <a:bodyPr anchor="t" rtlCol="false" tIns="0" lIns="0" bIns="0" rIns="0">
+            <a:spAutoFit/>
+          </a:bodyPr>
+          <a:lstStyle/>
+          <a:p>
+            <a:pPr algn="l">
+              <a:lnSpc>
+                <a:spcPts val="2520"/>
+              </a:lnSpc>
+            </a:pPr>
+            <a:r>
+              <a:rPr lang="en-US" sz="1800">
+                <a:solidFill>
+                  <a:srgbClr val="00B4D8"/>
+                </a:solidFill>
+                <a:latin typeface="Courier New"/>
+                <a:ea typeface="Courier New"/>
+                <a:cs typeface="Courier New"/>
+                <a:sym typeface="Courier New"/>
+              </a:rPr>
+              <a:t>customers/0</a:t>
+            </a:r>
+          </a:p>
+        </p:txBody>
+      </p:sp>
+      <p:sp>
+        <p:nvSpPr>
+          <p:cNvPr name="TextBox 51" id="51"/>
+          <p:cNvSpPr txBox="true"/>
+          <p:nvPr/>
+        </p:nvSpPr>
+        <p:spPr>
+          <a:xfrm rot="0">
+            <a:off x="15268004" y="5838139"/>
+            <a:ext cx="159258" cy="312144"/>
+          </a:xfrm>
+          <a:prstGeom prst="rect">
+            <a:avLst/>
+          </a:prstGeom>
+        </p:spPr>
+        <p:txBody>
+          <a:bodyPr anchor="t" rtlCol="false" tIns="0" lIns="0" bIns="0" rIns="0">
+            <a:spAutoFit/>
+          </a:bodyPr>
+          <a:lstStyle/>
+          <a:p>
+            <a:pPr algn="l">
+              <a:lnSpc>
+                <a:spcPts val="2520"/>
+              </a:lnSpc>
+            </a:pPr>
+            <a:r>
+              <a:rPr lang="en-US" sz="1800">
+                <a:solidFill>
+                  <a:srgbClr val="FFD166"/>
+                </a:solidFill>
+                <a:latin typeface="Noto Sans"/>
+                <a:ea typeface="Noto Sans"/>
+                <a:cs typeface="Noto Sans"/>
+                <a:sym typeface="Noto Sans"/>
+              </a:rPr>
+              <a:t>✓</a:t>
+            </a:r>
+          </a:p>
+        </p:txBody>
+      </p:sp>
+      <p:sp>
+        <p:nvSpPr>
+          <p:cNvPr name="TextBox 52" id="52"/>
+          <p:cNvSpPr txBox="true"/>
+          <p:nvPr/>
+        </p:nvSpPr>
+        <p:spPr>
+          <a:xfrm rot="0">
+            <a:off x="14721840" y="3472129"/>
+            <a:ext cx="869642" cy="377752"/>
+          </a:xfrm>
+          <a:prstGeom prst="rect">
+            <a:avLst/>
+          </a:prstGeom>
+        </p:spPr>
+        <p:txBody>
+          <a:bodyPr anchor="t" rtlCol="false" tIns="0" lIns="0" bIns="0" rIns="0">
+            <a:spAutoFit/>
+          </a:bodyPr>
+          <a:lstStyle/>
+          <a:p>
+            <a:pPr algn="l">
+              <a:lnSpc>
+                <a:spcPts val="2799"/>
+              </a:lnSpc>
+            </a:pPr>
+            <a:r>
+              <a:rPr lang="en-US" b="true" sz="1999">
+                <a:solidFill>
+                  <a:srgbClr val="FFFFFF"/>
                 </a:solidFill>
                 <a:latin typeface="Calibri (MS) Bold"/>
                 <a:ea typeface="Calibri (MS) Bold"/>
                 <a:cs typeface="Calibri (MS) Bold"/>
                 <a:sym typeface="Calibri (MS) Bold"/>
               </a:rPr>
-              <a:t>Page Table</a:t>
-            </a:r>
-          </a:p>
-        </p:txBody>
-      </p:sp>
-      <p:sp>
-        <p:nvSpPr>
-          <p:cNvPr name="TextBox 43" id="43"/>
+              <a:t>Frame 1</a:t>
+            </a:r>
+          </a:p>
+        </p:txBody>
+      </p:sp>
+      <p:sp>
+        <p:nvSpPr>
+          <p:cNvPr name="TextBox 53" id="53"/>
           <p:cNvSpPr txBox="true"/>
           <p:nvPr/>
         </p:nvSpPr>
         <p:spPr>
           <a:xfrm rot="0">
-            <a:off x="11247120" y="4152138"/>
-            <a:ext cx="2098891" cy="318106"/>
+            <a:off x="14721840" y="5081473"/>
+            <a:ext cx="869642" cy="377752"/>
           </a:xfrm>
           <a:prstGeom prst="rect">
             <a:avLst/>
@@ -25605,34 +26015,34 @@
           <a:p>
             <a:pPr algn="l">
               <a:lnSpc>
-                <a:spcPts val="2520"/>
-              </a:lnSpc>
-            </a:pPr>
-            <a:r>
-              <a:rPr lang="en-US" sz="1800">
-                <a:solidFill>
-                  <a:srgbClr val="8BA8BE"/>
-                </a:solidFill>
-                <a:latin typeface="Courier New"/>
-                <a:ea typeface="Courier New"/>
-                <a:cs typeface="Courier New"/>
-                <a:sym typeface="Courier New"/>
-              </a:rPr>
-              <a:t>Page ID → Frame</a:t>
-            </a:r>
-          </a:p>
-        </p:txBody>
-      </p:sp>
-      <p:sp>
-        <p:nvSpPr>
-          <p:cNvPr name="TextBox 44" id="44"/>
+                <a:spcPts val="2799"/>
+              </a:lnSpc>
+            </a:pPr>
+            <a:r>
+              <a:rPr lang="en-US" b="true" sz="1999">
+                <a:solidFill>
+                  <a:srgbClr val="FFFFFF"/>
+                </a:solidFill>
+                <a:latin typeface="Calibri (MS) Bold"/>
+                <a:ea typeface="Calibri (MS) Bold"/>
+                <a:cs typeface="Calibri (MS) Bold"/>
+                <a:sym typeface="Calibri (MS) Bold"/>
+              </a:rPr>
+              <a:t>Frame 3</a:t>
+            </a:r>
+          </a:p>
+        </p:txBody>
+      </p:sp>
+      <p:sp>
+        <p:nvSpPr>
+          <p:cNvPr name="TextBox 54" id="54"/>
           <p:cNvSpPr txBox="true"/>
           <p:nvPr/>
         </p:nvSpPr>
         <p:spPr>
           <a:xfrm rot="0">
-            <a:off x="11247120" y="4700778"/>
-            <a:ext cx="2238813" cy="318106"/>
+            <a:off x="14721840" y="6690817"/>
+            <a:ext cx="1000906" cy="377752"/>
           </a:xfrm>
           <a:prstGeom prst="rect">
             <a:avLst/>
@@ -25646,34 +26056,34 @@
           <a:p>
             <a:pPr algn="l">
               <a:lnSpc>
-                <a:spcPts val="2520"/>
-              </a:lnSpc>
-            </a:pPr>
-            <a:r>
-              <a:rPr lang="en-US" sz="1800">
+                <a:spcPts val="2799"/>
+              </a:lnSpc>
+            </a:pPr>
+            <a:r>
+              <a:rPr lang="en-US" b="true" sz="1999">
                 <a:solidFill>
                   <a:srgbClr val="FFFFFF"/>
                 </a:solidFill>
-                <a:latin typeface="Courier New"/>
-                <a:ea typeface="Courier New"/>
-                <a:cs typeface="Courier New"/>
-                <a:sym typeface="Courier New"/>
-              </a:rPr>
-              <a:t>customers/0 → F3</a:t>
-            </a:r>
-          </a:p>
-        </p:txBody>
-      </p:sp>
-      <p:sp>
-        <p:nvSpPr>
-          <p:cNvPr name="TextBox 45" id="45"/>
+                <a:latin typeface="Calibri (MS) Bold"/>
+                <a:ea typeface="Calibri (MS) Bold"/>
+                <a:cs typeface="Calibri (MS) Bold"/>
+                <a:sym typeface="Calibri (MS) Bold"/>
+              </a:rPr>
+              <a:t>Frame 12</a:t>
+            </a:r>
+          </a:p>
+        </p:txBody>
+      </p:sp>
+      <p:sp>
+        <p:nvSpPr>
+          <p:cNvPr name="TextBox 55" id="55"/>
           <p:cNvSpPr txBox="true"/>
           <p:nvPr/>
         </p:nvSpPr>
         <p:spPr>
           <a:xfrm rot="0">
-            <a:off x="11247120" y="5249418"/>
-            <a:ext cx="1819037" cy="318106"/>
+            <a:off x="14721840" y="8300161"/>
+            <a:ext cx="1000906" cy="377752"/>
           </a:xfrm>
           <a:prstGeom prst="rect">
             <a:avLst/>
@@ -25687,34 +26097,34 @@
           <a:p>
             <a:pPr algn="l">
               <a:lnSpc>
-                <a:spcPts val="2520"/>
-              </a:lnSpc>
-            </a:pPr>
-            <a:r>
-              <a:rPr lang="en-US" sz="1800">
-                <a:solidFill>
-                  <a:srgbClr val="FFFFFF"/>
-                </a:solidFill>
-                <a:latin typeface="Courier New"/>
-                <a:ea typeface="Courier New"/>
-                <a:cs typeface="Courier New"/>
-                <a:sym typeface="Courier New"/>
-              </a:rPr>
-              <a:t>orders/0 → F1</a:t>
-            </a:r>
-          </a:p>
-        </p:txBody>
-      </p:sp>
-      <p:sp>
-        <p:nvSpPr>
-          <p:cNvPr name="TextBox 46" id="46"/>
+                <a:spcPts val="2799"/>
+              </a:lnSpc>
+            </a:pPr>
+            <a:r>
+              <a:rPr lang="en-US" b="true" sz="1999">
+                <a:solidFill>
+                  <a:srgbClr val="8BA8BE"/>
+                </a:solidFill>
+                <a:latin typeface="Calibri (MS) Bold"/>
+                <a:ea typeface="Calibri (MS) Bold"/>
+                <a:cs typeface="Calibri (MS) Bold"/>
+                <a:sym typeface="Calibri (MS) Bold"/>
+              </a:rPr>
+              <a:t>Frame 15</a:t>
+            </a:r>
+          </a:p>
+        </p:txBody>
+      </p:sp>
+      <p:sp>
+        <p:nvSpPr>
+          <p:cNvPr name="TextBox 56" id="56"/>
           <p:cNvSpPr txBox="true"/>
           <p:nvPr/>
         </p:nvSpPr>
         <p:spPr>
           <a:xfrm rot="0">
-            <a:off x="11247120" y="5798058"/>
-            <a:ext cx="1958969" cy="318106"/>
+            <a:off x="14721840" y="4229672"/>
+            <a:ext cx="690229" cy="393611"/>
           </a:xfrm>
           <a:prstGeom prst="rect">
             <a:avLst/>
@@ -25734,28 +26144,28 @@
             <a:r>
               <a:rPr lang="en-US" sz="1800">
                 <a:solidFill>
-                  <a:srgbClr val="FFFFFF"/>
-                </a:solidFill>
-                <a:latin typeface="Courier New"/>
-                <a:ea typeface="Courier New"/>
-                <a:cs typeface="Courier New"/>
-                <a:sym typeface="Courier New"/>
-              </a:rPr>
-              <a:t>orders/1 → F12</a:t>
-            </a:r>
-          </a:p>
-        </p:txBody>
-      </p:sp>
-      <p:sp>
-        <p:nvSpPr>
-          <p:cNvPr name="TextBox 47" id="47"/>
+                  <a:srgbClr val="8BA8BE"/>
+                </a:solidFill>
+                <a:latin typeface="Calibri (MS)"/>
+                <a:ea typeface="Calibri (MS)"/>
+                <a:cs typeface="Calibri (MS)"/>
+                <a:sym typeface="Calibri (MS)"/>
+              </a:rPr>
+              <a:t>dirty=✗</a:t>
+            </a:r>
+          </a:p>
+        </p:txBody>
+      </p:sp>
+      <p:sp>
+        <p:nvSpPr>
+          <p:cNvPr name="TextBox 57" id="57"/>
           <p:cNvSpPr txBox="true"/>
           <p:nvPr/>
         </p:nvSpPr>
         <p:spPr>
           <a:xfrm rot="0">
-            <a:off x="14721840" y="8795004"/>
-            <a:ext cx="559708" cy="318106"/>
+            <a:off x="14721840" y="5839016"/>
+            <a:ext cx="557089" cy="339090"/>
           </a:xfrm>
           <a:prstGeom prst="rect">
             <a:avLst/>
@@ -25775,28 +26185,28 @@
             <a:r>
               <a:rPr lang="en-US" sz="1800">
                 <a:solidFill>
-                  <a:srgbClr val="8BA8BE"/>
-                </a:solidFill>
-                <a:latin typeface="Courier New"/>
-                <a:ea typeface="Courier New"/>
-                <a:cs typeface="Courier New"/>
-                <a:sym typeface="Courier New"/>
-              </a:rPr>
-              <a:t>FREE</a:t>
-            </a:r>
-          </a:p>
-        </p:txBody>
-      </p:sp>
-      <p:sp>
-        <p:nvSpPr>
-          <p:cNvPr name="TextBox 48" id="48"/>
+                  <a:srgbClr val="FFD166"/>
+                </a:solidFill>
+                <a:latin typeface="Calibri (MS)"/>
+                <a:ea typeface="Calibri (MS)"/>
+                <a:cs typeface="Calibri (MS)"/>
+                <a:sym typeface="Calibri (MS)"/>
+              </a:rPr>
+              <a:t>dirty=</a:t>
+            </a:r>
+          </a:p>
+        </p:txBody>
+      </p:sp>
+      <p:sp>
+        <p:nvSpPr>
+          <p:cNvPr name="TextBox 58" id="58"/>
           <p:cNvSpPr txBox="true"/>
           <p:nvPr/>
         </p:nvSpPr>
         <p:spPr>
           <a:xfrm rot="0">
-            <a:off x="14721840" y="3966972"/>
-            <a:ext cx="1119407" cy="318106"/>
+            <a:off x="14721840" y="7448360"/>
+            <a:ext cx="557089" cy="339090"/>
           </a:xfrm>
           <a:prstGeom prst="rect">
             <a:avLst/>
@@ -25816,28 +26226,28 @@
             <a:r>
               <a:rPr lang="en-US" sz="1800">
                 <a:solidFill>
-                  <a:srgbClr val="00B4D8"/>
-                </a:solidFill>
-                <a:latin typeface="Courier New"/>
-                <a:ea typeface="Courier New"/>
-                <a:cs typeface="Courier New"/>
-                <a:sym typeface="Courier New"/>
-              </a:rPr>
-              <a:t>orders/0</a:t>
-            </a:r>
-          </a:p>
-        </p:txBody>
-      </p:sp>
-      <p:sp>
-        <p:nvSpPr>
-          <p:cNvPr name="TextBox 49" id="49"/>
+                  <a:srgbClr val="FFD166"/>
+                </a:solidFill>
+                <a:latin typeface="Calibri (MS)"/>
+                <a:ea typeface="Calibri (MS)"/>
+                <a:cs typeface="Calibri (MS)"/>
+                <a:sym typeface="Calibri (MS)"/>
+              </a:rPr>
+              <a:t>dirty=</a:t>
+            </a:r>
+          </a:p>
+        </p:txBody>
+      </p:sp>
+      <p:sp>
+        <p:nvSpPr>
+          <p:cNvPr name="TextBox 59" id="59"/>
           <p:cNvSpPr txBox="true"/>
           <p:nvPr/>
         </p:nvSpPr>
         <p:spPr>
           <a:xfrm rot="0">
-            <a:off x="14721840" y="7185660"/>
-            <a:ext cx="1119407" cy="318106"/>
+            <a:off x="15398563" y="4229672"/>
+            <a:ext cx="638337" cy="339090"/>
           </a:xfrm>
           <a:prstGeom prst="rect">
             <a:avLst/>
@@ -25857,28 +26267,28 @@
             <a:r>
               <a:rPr lang="en-US" sz="1800">
                 <a:solidFill>
-                  <a:srgbClr val="00B4D8"/>
-                </a:solidFill>
-                <a:latin typeface="Courier New"/>
-                <a:ea typeface="Courier New"/>
-                <a:cs typeface="Courier New"/>
-                <a:sym typeface="Courier New"/>
-              </a:rPr>
-              <a:t>orders/1</a:t>
-            </a:r>
-          </a:p>
-        </p:txBody>
-      </p:sp>
-      <p:sp>
-        <p:nvSpPr>
-          <p:cNvPr name="TextBox 50" id="50"/>
+                  <a:srgbClr val="8BA8BE"/>
+                </a:solidFill>
+                <a:latin typeface="Calibri (MS)"/>
+                <a:ea typeface="Calibri (MS)"/>
+                <a:cs typeface="Calibri (MS)"/>
+                <a:sym typeface="Calibri (MS)"/>
+              </a:rPr>
+              <a:t> pin=2</a:t>
+            </a:r>
+          </a:p>
+        </p:txBody>
+      </p:sp>
+      <p:sp>
+        <p:nvSpPr>
+          <p:cNvPr name="TextBox 60" id="60"/>
           <p:cNvSpPr txBox="true"/>
           <p:nvPr/>
         </p:nvSpPr>
         <p:spPr>
           <a:xfrm rot="0">
-            <a:off x="15268004" y="7447483"/>
-            <a:ext cx="159258" cy="312144"/>
+            <a:off x="15424156" y="5839016"/>
+            <a:ext cx="638337" cy="339090"/>
           </a:xfrm>
           <a:prstGeom prst="rect">
             <a:avLst/>
@@ -25900,422 +26310,12 @@
                 <a:solidFill>
                   <a:srgbClr val="FFD166"/>
                 </a:solidFill>
-                <a:latin typeface="Noto Sans"/>
-                <a:ea typeface="Noto Sans"/>
-                <a:cs typeface="Noto Sans"/>
-                <a:sym typeface="Noto Sans"/>
-              </a:rPr>
-              <a:t>✓</a:t>
-            </a:r>
-          </a:p>
-        </p:txBody>
-      </p:sp>
-      <p:sp>
-        <p:nvSpPr>
-          <p:cNvPr name="TextBox 51" id="51"/>
-          <p:cNvSpPr txBox="true"/>
-          <p:nvPr/>
-        </p:nvSpPr>
-        <p:spPr>
-          <a:xfrm rot="0">
-            <a:off x="14721840" y="5576316"/>
-            <a:ext cx="1539183" cy="318106"/>
-          </a:xfrm>
-          <a:prstGeom prst="rect">
-            <a:avLst/>
-          </a:prstGeom>
-        </p:spPr>
-        <p:txBody>
-          <a:bodyPr anchor="t" rtlCol="false" tIns="0" lIns="0" bIns="0" rIns="0">
-            <a:spAutoFit/>
-          </a:bodyPr>
-          <a:lstStyle/>
-          <a:p>
-            <a:pPr algn="l">
-              <a:lnSpc>
-                <a:spcPts val="2520"/>
-              </a:lnSpc>
-            </a:pPr>
-            <a:r>
-              <a:rPr lang="en-US" sz="1800">
-                <a:solidFill>
-                  <a:srgbClr val="00B4D8"/>
-                </a:solidFill>
-                <a:latin typeface="Courier New"/>
-                <a:ea typeface="Courier New"/>
-                <a:cs typeface="Courier New"/>
-                <a:sym typeface="Courier New"/>
-              </a:rPr>
-              <a:t>customers/0</a:t>
-            </a:r>
-          </a:p>
-        </p:txBody>
-      </p:sp>
-      <p:sp>
-        <p:nvSpPr>
-          <p:cNvPr name="TextBox 52" id="52"/>
-          <p:cNvSpPr txBox="true"/>
-          <p:nvPr/>
-        </p:nvSpPr>
-        <p:spPr>
-          <a:xfrm rot="0">
-            <a:off x="15268004" y="5838139"/>
-            <a:ext cx="159258" cy="312144"/>
-          </a:xfrm>
-          <a:prstGeom prst="rect">
-            <a:avLst/>
-          </a:prstGeom>
-        </p:spPr>
-        <p:txBody>
-          <a:bodyPr anchor="t" rtlCol="false" tIns="0" lIns="0" bIns="0" rIns="0">
-            <a:spAutoFit/>
-          </a:bodyPr>
-          <a:lstStyle/>
-          <a:p>
-            <a:pPr algn="l">
-              <a:lnSpc>
-                <a:spcPts val="2520"/>
-              </a:lnSpc>
-            </a:pPr>
-            <a:r>
-              <a:rPr lang="en-US" sz="1800">
-                <a:solidFill>
-                  <a:srgbClr val="FFD166"/>
-                </a:solidFill>
-                <a:latin typeface="Noto Sans"/>
-                <a:ea typeface="Noto Sans"/>
-                <a:cs typeface="Noto Sans"/>
-                <a:sym typeface="Noto Sans"/>
-              </a:rPr>
-              <a:t>✓</a:t>
-            </a:r>
-          </a:p>
-        </p:txBody>
-      </p:sp>
-      <p:sp>
-        <p:nvSpPr>
-          <p:cNvPr name="TextBox 53" id="53"/>
-          <p:cNvSpPr txBox="true"/>
-          <p:nvPr/>
-        </p:nvSpPr>
-        <p:spPr>
-          <a:xfrm rot="0">
-            <a:off x="14721840" y="3472129"/>
-            <a:ext cx="869642" cy="377752"/>
-          </a:xfrm>
-          <a:prstGeom prst="rect">
-            <a:avLst/>
-          </a:prstGeom>
-        </p:spPr>
-        <p:txBody>
-          <a:bodyPr anchor="t" rtlCol="false" tIns="0" lIns="0" bIns="0" rIns="0">
-            <a:spAutoFit/>
-          </a:bodyPr>
-          <a:lstStyle/>
-          <a:p>
-            <a:pPr algn="l">
-              <a:lnSpc>
-                <a:spcPts val="2799"/>
-              </a:lnSpc>
-            </a:pPr>
-            <a:r>
-              <a:rPr lang="en-US" b="true" sz="1999">
-                <a:solidFill>
-                  <a:srgbClr val="FFFFFF"/>
-                </a:solidFill>
-                <a:latin typeface="Calibri (MS) Bold"/>
-                <a:ea typeface="Calibri (MS) Bold"/>
-                <a:cs typeface="Calibri (MS) Bold"/>
-                <a:sym typeface="Calibri (MS) Bold"/>
-              </a:rPr>
-              <a:t>Frame 1</a:t>
-            </a:r>
-          </a:p>
-        </p:txBody>
-      </p:sp>
-      <p:sp>
-        <p:nvSpPr>
-          <p:cNvPr name="TextBox 54" id="54"/>
-          <p:cNvSpPr txBox="true"/>
-          <p:nvPr/>
-        </p:nvSpPr>
-        <p:spPr>
-          <a:xfrm rot="0">
-            <a:off x="14721840" y="5081473"/>
-            <a:ext cx="869642" cy="377752"/>
-          </a:xfrm>
-          <a:prstGeom prst="rect">
-            <a:avLst/>
-          </a:prstGeom>
-        </p:spPr>
-        <p:txBody>
-          <a:bodyPr anchor="t" rtlCol="false" tIns="0" lIns="0" bIns="0" rIns="0">
-            <a:spAutoFit/>
-          </a:bodyPr>
-          <a:lstStyle/>
-          <a:p>
-            <a:pPr algn="l">
-              <a:lnSpc>
-                <a:spcPts val="2799"/>
-              </a:lnSpc>
-            </a:pPr>
-            <a:r>
-              <a:rPr lang="en-US" b="true" sz="1999">
-                <a:solidFill>
-                  <a:srgbClr val="FFFFFF"/>
-                </a:solidFill>
-                <a:latin typeface="Calibri (MS) Bold"/>
-                <a:ea typeface="Calibri (MS) Bold"/>
-                <a:cs typeface="Calibri (MS) Bold"/>
-                <a:sym typeface="Calibri (MS) Bold"/>
-              </a:rPr>
-              <a:t>Frame 3</a:t>
-            </a:r>
-          </a:p>
-        </p:txBody>
-      </p:sp>
-      <p:sp>
-        <p:nvSpPr>
-          <p:cNvPr name="TextBox 55" id="55"/>
-          <p:cNvSpPr txBox="true"/>
-          <p:nvPr/>
-        </p:nvSpPr>
-        <p:spPr>
-          <a:xfrm rot="0">
-            <a:off x="14721840" y="6690817"/>
-            <a:ext cx="1000906" cy="377752"/>
-          </a:xfrm>
-          <a:prstGeom prst="rect">
-            <a:avLst/>
-          </a:prstGeom>
-        </p:spPr>
-        <p:txBody>
-          <a:bodyPr anchor="t" rtlCol="false" tIns="0" lIns="0" bIns="0" rIns="0">
-            <a:spAutoFit/>
-          </a:bodyPr>
-          <a:lstStyle/>
-          <a:p>
-            <a:pPr algn="l">
-              <a:lnSpc>
-                <a:spcPts val="2799"/>
-              </a:lnSpc>
-            </a:pPr>
-            <a:r>
-              <a:rPr lang="en-US" b="true" sz="1999">
-                <a:solidFill>
-                  <a:srgbClr val="FFFFFF"/>
-                </a:solidFill>
-                <a:latin typeface="Calibri (MS) Bold"/>
-                <a:ea typeface="Calibri (MS) Bold"/>
-                <a:cs typeface="Calibri (MS) Bold"/>
-                <a:sym typeface="Calibri (MS) Bold"/>
-              </a:rPr>
-              <a:t>Frame 12</a:t>
-            </a:r>
-          </a:p>
-        </p:txBody>
-      </p:sp>
-      <p:sp>
-        <p:nvSpPr>
-          <p:cNvPr name="TextBox 56" id="56"/>
-          <p:cNvSpPr txBox="true"/>
-          <p:nvPr/>
-        </p:nvSpPr>
-        <p:spPr>
-          <a:xfrm rot="0">
-            <a:off x="14721840" y="8300161"/>
-            <a:ext cx="1000906" cy="377752"/>
-          </a:xfrm>
-          <a:prstGeom prst="rect">
-            <a:avLst/>
-          </a:prstGeom>
-        </p:spPr>
-        <p:txBody>
-          <a:bodyPr anchor="t" rtlCol="false" tIns="0" lIns="0" bIns="0" rIns="0">
-            <a:spAutoFit/>
-          </a:bodyPr>
-          <a:lstStyle/>
-          <a:p>
-            <a:pPr algn="l">
-              <a:lnSpc>
-                <a:spcPts val="2799"/>
-              </a:lnSpc>
-            </a:pPr>
-            <a:r>
-              <a:rPr lang="en-US" b="true" sz="1999">
-                <a:solidFill>
-                  <a:srgbClr val="8BA8BE"/>
-                </a:solidFill>
-                <a:latin typeface="Calibri (MS) Bold"/>
-                <a:ea typeface="Calibri (MS) Bold"/>
-                <a:cs typeface="Calibri (MS) Bold"/>
-                <a:sym typeface="Calibri (MS) Bold"/>
-              </a:rPr>
-              <a:t>Frame 15</a:t>
-            </a:r>
-          </a:p>
-        </p:txBody>
-      </p:sp>
-      <p:sp>
-        <p:nvSpPr>
-          <p:cNvPr name="TextBox 57" id="57"/>
-          <p:cNvSpPr txBox="true"/>
-          <p:nvPr/>
-        </p:nvSpPr>
-        <p:spPr>
-          <a:xfrm rot="0">
-            <a:off x="14721840" y="4229672"/>
-            <a:ext cx="690229" cy="393611"/>
-          </a:xfrm>
-          <a:prstGeom prst="rect">
-            <a:avLst/>
-          </a:prstGeom>
-        </p:spPr>
-        <p:txBody>
-          <a:bodyPr anchor="t" rtlCol="false" tIns="0" lIns="0" bIns="0" rIns="0">
-            <a:spAutoFit/>
-          </a:bodyPr>
-          <a:lstStyle/>
-          <a:p>
-            <a:pPr algn="l">
-              <a:lnSpc>
-                <a:spcPts val="2520"/>
-              </a:lnSpc>
-            </a:pPr>
-            <a:r>
-              <a:rPr lang="en-US" sz="1800">
-                <a:solidFill>
-                  <a:srgbClr val="8BA8BE"/>
-                </a:solidFill>
                 <a:latin typeface="Calibri (MS)"/>
                 <a:ea typeface="Calibri (MS)"/>
                 <a:cs typeface="Calibri (MS)"/>
                 <a:sym typeface="Calibri (MS)"/>
               </a:rPr>
-              <a:t>dirty=✗</a:t>
-            </a:r>
-          </a:p>
-        </p:txBody>
-      </p:sp>
-      <p:sp>
-        <p:nvSpPr>
-          <p:cNvPr name="TextBox 58" id="58"/>
-          <p:cNvSpPr txBox="true"/>
-          <p:nvPr/>
-        </p:nvSpPr>
-        <p:spPr>
-          <a:xfrm rot="0">
-            <a:off x="14721840" y="5839016"/>
-            <a:ext cx="557089" cy="339090"/>
-          </a:xfrm>
-          <a:prstGeom prst="rect">
-            <a:avLst/>
-          </a:prstGeom>
-        </p:spPr>
-        <p:txBody>
-          <a:bodyPr anchor="t" rtlCol="false" tIns="0" lIns="0" bIns="0" rIns="0">
-            <a:spAutoFit/>
-          </a:bodyPr>
-          <a:lstStyle/>
-          <a:p>
-            <a:pPr algn="l">
-              <a:lnSpc>
-                <a:spcPts val="2520"/>
-              </a:lnSpc>
-            </a:pPr>
-            <a:r>
-              <a:rPr lang="en-US" sz="1800">
-                <a:solidFill>
-                  <a:srgbClr val="FFD166"/>
-                </a:solidFill>
-                <a:latin typeface="Calibri (MS)"/>
-                <a:ea typeface="Calibri (MS)"/>
-                <a:cs typeface="Calibri (MS)"/>
-                <a:sym typeface="Calibri (MS)"/>
-              </a:rPr>
-              <a:t>dirty=</a:t>
-            </a:r>
-          </a:p>
-        </p:txBody>
-      </p:sp>
-      <p:sp>
-        <p:nvSpPr>
-          <p:cNvPr name="TextBox 59" id="59"/>
-          <p:cNvSpPr txBox="true"/>
-          <p:nvPr/>
-        </p:nvSpPr>
-        <p:spPr>
-          <a:xfrm rot="0">
-            <a:off x="14721840" y="7448360"/>
-            <a:ext cx="557089" cy="339090"/>
-          </a:xfrm>
-          <a:prstGeom prst="rect">
-            <a:avLst/>
-          </a:prstGeom>
-        </p:spPr>
-        <p:txBody>
-          <a:bodyPr anchor="t" rtlCol="false" tIns="0" lIns="0" bIns="0" rIns="0">
-            <a:spAutoFit/>
-          </a:bodyPr>
-          <a:lstStyle/>
-          <a:p>
-            <a:pPr algn="l">
-              <a:lnSpc>
-                <a:spcPts val="2520"/>
-              </a:lnSpc>
-            </a:pPr>
-            <a:r>
-              <a:rPr lang="en-US" sz="1800">
-                <a:solidFill>
-                  <a:srgbClr val="FFD166"/>
-                </a:solidFill>
-                <a:latin typeface="Calibri (MS)"/>
-                <a:ea typeface="Calibri (MS)"/>
-                <a:cs typeface="Calibri (MS)"/>
-                <a:sym typeface="Calibri (MS)"/>
-              </a:rPr>
-              <a:t>dirty=</a:t>
-            </a:r>
-          </a:p>
-        </p:txBody>
-      </p:sp>
-      <p:sp>
-        <p:nvSpPr>
-          <p:cNvPr name="TextBox 60" id="60"/>
-          <p:cNvSpPr txBox="true"/>
-          <p:nvPr/>
-        </p:nvSpPr>
-        <p:spPr>
-          <a:xfrm rot="0">
-            <a:off x="15398563" y="4229672"/>
-            <a:ext cx="638337" cy="339090"/>
-          </a:xfrm>
-          <a:prstGeom prst="rect">
-            <a:avLst/>
-          </a:prstGeom>
-        </p:spPr>
-        <p:txBody>
-          <a:bodyPr anchor="t" rtlCol="false" tIns="0" lIns="0" bIns="0" rIns="0">
-            <a:spAutoFit/>
-          </a:bodyPr>
-          <a:lstStyle/>
-          <a:p>
-            <a:pPr algn="l">
-              <a:lnSpc>
-                <a:spcPts val="2520"/>
-              </a:lnSpc>
-            </a:pPr>
-            <a:r>
-              <a:rPr lang="en-US" sz="1800">
-                <a:solidFill>
-                  <a:srgbClr val="8BA8BE"/>
-                </a:solidFill>
-                <a:latin typeface="Calibri (MS)"/>
-                <a:ea typeface="Calibri (MS)"/>
-                <a:cs typeface="Calibri (MS)"/>
-                <a:sym typeface="Calibri (MS)"/>
-              </a:rPr>
-              <a:t> pin=2</a:t>
+              <a:t> pin=1</a:t>
             </a:r>
           </a:p>
         </p:txBody>
@@ -26323,47 +26323,6 @@
       <p:sp>
         <p:nvSpPr>
           <p:cNvPr name="TextBox 61" id="61"/>
-          <p:cNvSpPr txBox="true"/>
-          <p:nvPr/>
-        </p:nvSpPr>
-        <p:spPr>
-          <a:xfrm rot="0">
-            <a:off x="15424156" y="5839016"/>
-            <a:ext cx="638337" cy="339090"/>
-          </a:xfrm>
-          <a:prstGeom prst="rect">
-            <a:avLst/>
-          </a:prstGeom>
-        </p:spPr>
-        <p:txBody>
-          <a:bodyPr anchor="t" rtlCol="false" tIns="0" lIns="0" bIns="0" rIns="0">
-            <a:spAutoFit/>
-          </a:bodyPr>
-          <a:lstStyle/>
-          <a:p>
-            <a:pPr algn="l">
-              <a:lnSpc>
-                <a:spcPts val="2520"/>
-              </a:lnSpc>
-            </a:pPr>
-            <a:r>
-              <a:rPr lang="en-US" sz="1800">
-                <a:solidFill>
-                  <a:srgbClr val="FFD166"/>
-                </a:solidFill>
-                <a:latin typeface="Calibri (MS)"/>
-                <a:ea typeface="Calibri (MS)"/>
-                <a:cs typeface="Calibri (MS)"/>
-                <a:sym typeface="Calibri (MS)"/>
-              </a:rPr>
-              <a:t> pin=1</a:t>
-            </a:r>
-          </a:p>
-        </p:txBody>
-      </p:sp>
-      <p:sp>
-        <p:nvSpPr>
-          <p:cNvPr name="TextBox 62" id="62"/>
           <p:cNvSpPr txBox="true"/>
           <p:nvPr/>
         </p:nvSpPr>
@@ -27845,7 +27804,7 @@
         <p:spPr>
           <a:xfrm rot="0">
             <a:off x="9491472" y="8062684"/>
-            <a:ext cx="3859882" cy="702269"/>
+            <a:ext cx="3859882" cy="1021131"/>
           </a:xfrm>
           <a:prstGeom prst="rect">
             <a:avLst/>
@@ -27872,7 +27831,26 @@
                 <a:cs typeface="Calibri (MS)"/>
                 <a:sym typeface="Calibri (MS)"/>
               </a:rPr>
-              <a:t>Stranica ostaje ili se uklanja; dirty → flush na disk pre uklanjanja</a:t>
+              <a:t>Stranica ostaje ili se uklanja; </a:t>
+            </a:r>
+          </a:p>
+          <a:p>
+            <a:pPr algn="l">
+              <a:lnSpc>
+                <a:spcPts val="2624"/>
+              </a:lnSpc>
+            </a:pPr>
+            <a:r>
+              <a:rPr lang="en-US" sz="2199">
+                <a:solidFill>
+                  <a:srgbClr val="E8F4F8"/>
+                </a:solidFill>
+                <a:latin typeface="Calibri (MS)"/>
+                <a:ea typeface="Calibri (MS)"/>
+                <a:cs typeface="Calibri (MS)"/>
+                <a:sym typeface="Calibri (MS)"/>
+              </a:rPr>
+              <a:t>dirty → flush na disk pre uklanjanja</a:t>
             </a:r>
           </a:p>
         </p:txBody>
@@ -28865,7 +28843,7 @@
         <p:spPr>
           <a:xfrm rot="0">
             <a:off x="786384" y="4561999"/>
-            <a:ext cx="7782087" cy="1281827"/>
+            <a:ext cx="7782087" cy="1344981"/>
           </a:xfrm>
           <a:prstGeom prst="rect">
             <a:avLst/>
@@ -28918,7 +28896,7 @@
                 <a:cs typeface="Calibri (MS)"/>
                 <a:sym typeface="Calibri (MS)"/>
               </a:rPr>
-              <a:t>Svaki zahtev generiše shared read (disk I/O) — stranice se učitavaju sa diska jednu po jednu</a:t>
+              <a:t>Svaki zahtev generiše shared read (disk I/O) — stranice se učitavaju sa diska jedna po jedna</a:t>
             </a:r>
           </a:p>
         </p:txBody>
@@ -29262,9 +29240,9 @@
         <p:grpSpPr>
           <a:xfrm rot="0">
             <a:off x="393697" y="1490977"/>
-            <a:ext cx="8630917" cy="6710677"/>
+            <a:ext cx="8630917" cy="5974773"/>
             <a:chOff x="0" y="0"/>
-            <a:chExt cx="8630920" cy="6710680"/>
+            <a:chExt cx="8630920" cy="5974776"/>
           </a:xfrm>
         </p:grpSpPr>
         <p:sp>
@@ -29275,8 +29253,8 @@
           </p:nvSpPr>
           <p:spPr>
             <a:xfrm flipH="false" flipV="false" rot="0">
-              <a:off x="63500" y="63500"/>
-              <a:ext cx="8503920" cy="6583680"/>
+              <a:off x="63500" y="56536"/>
+              <a:ext cx="8503920" cy="5861703"/>
             </a:xfrm>
             <a:custGeom>
               <a:avLst/>
@@ -29285,15 +29263,15 @@
               <a:cxnLst/>
               <a:rect r="r" b="b" t="t" l="l"/>
               <a:pathLst>
-                <a:path h="6583680" w="8503920">
+                <a:path h="5861703" w="8503920">
                   <a:moveTo>
                     <a:pt x="0" y="0"/>
                   </a:moveTo>
                   <a:lnTo>
-                    <a:pt x="0" y="6583680"/>
-                  </a:lnTo>
-                  <a:lnTo>
-                    <a:pt x="8503920" y="6583680"/>
+                    <a:pt x="0" y="5861703"/>
+                  </a:lnTo>
+                  <a:lnTo>
+                    <a:pt x="8503920" y="5861703"/>
                   </a:lnTo>
                   <a:lnTo>
                     <a:pt x="8503920" y="0"/>
@@ -29315,8 +29293,8 @@
           </p:nvSpPr>
           <p:spPr>
             <a:xfrm flipH="false" flipV="false" rot="0">
-              <a:off x="63500" y="63500"/>
-              <a:ext cx="8502142" cy="1060704"/>
+              <a:off x="63500" y="56536"/>
+              <a:ext cx="8502142" cy="944385"/>
             </a:xfrm>
             <a:custGeom>
               <a:avLst/>
@@ -29325,15 +29303,15 @@
               <a:cxnLst/>
               <a:rect r="r" b="b" t="t" l="l"/>
               <a:pathLst>
-                <a:path h="1060704" w="8502142">
+                <a:path h="944385" w="8502142">
                   <a:moveTo>
                     <a:pt x="0" y="0"/>
                   </a:moveTo>
                   <a:lnTo>
-                    <a:pt x="0" y="1060704"/>
-                  </a:lnTo>
-                  <a:lnTo>
-                    <a:pt x="8502142" y="1060704"/>
+                    <a:pt x="0" y="944386"/>
+                  </a:lnTo>
+                  <a:lnTo>
+                    <a:pt x="8502142" y="944386"/>
                   </a:lnTo>
                   <a:lnTo>
                     <a:pt x="8502142" y="0"/>
@@ -29355,8 +29333,8 @@
           </p:nvSpPr>
           <p:spPr>
             <a:xfrm flipH="false" flipV="false" rot="0">
-              <a:off x="63500" y="63500"/>
-              <a:ext cx="8503920" cy="6583680"/>
+              <a:off x="63500" y="56536"/>
+              <a:ext cx="8503920" cy="5861703"/>
             </a:xfrm>
             <a:custGeom>
               <a:avLst/>
@@ -29365,12 +29343,12 @@
               <a:cxnLst/>
               <a:rect r="r" b="b" t="t" l="l"/>
               <a:pathLst>
-                <a:path h="6583680" w="8503920">
+                <a:path h="5861703" w="8503920">
                   <a:moveTo>
-                    <a:pt x="0" y="6583680"/>
+                    <a:pt x="0" y="5861703"/>
                   </a:moveTo>
                   <a:lnTo>
-                    <a:pt x="8503920" y="6583680"/>
+                    <a:pt x="8503920" y="5861703"/>
                   </a:lnTo>
                   <a:lnTo>
                     <a:pt x="8503920" y="0"/>
@@ -29397,8 +29375,8 @@
           </p:nvSpPr>
           <p:spPr>
             <a:xfrm flipH="false" flipV="false" rot="0">
-              <a:off x="63500" y="63500"/>
-              <a:ext cx="8503920" cy="1060704"/>
+              <a:off x="63500" y="56536"/>
+              <a:ext cx="8503920" cy="944385"/>
             </a:xfrm>
             <a:custGeom>
               <a:avLst/>
@@ -29407,12 +29385,12 @@
               <a:cxnLst/>
               <a:rect r="r" b="b" t="t" l="l"/>
               <a:pathLst>
-                <a:path h="1060704" w="8503920">
+                <a:path h="944385" w="8503920">
                   <a:moveTo>
-                    <a:pt x="0" y="1060704"/>
+                    <a:pt x="0" y="944386"/>
                   </a:moveTo>
                   <a:lnTo>
-                    <a:pt x="8503920" y="1060704"/>
+                    <a:pt x="8503920" y="944386"/>
                   </a:lnTo>
                   <a:lnTo>
                     <a:pt x="8503920" y="0"/>
@@ -29537,10 +29515,10 @@
         </p:nvGrpSpPr>
         <p:grpSpPr>
           <a:xfrm rot="0">
-            <a:off x="393697" y="8312401"/>
-            <a:ext cx="17500597" cy="1626613"/>
+            <a:off x="393697" y="7703875"/>
+            <a:ext cx="17500597" cy="2235139"/>
             <a:chOff x="0" y="0"/>
-            <a:chExt cx="17500600" cy="1626616"/>
+            <a:chExt cx="17500600" cy="2235143"/>
           </a:xfrm>
         </p:grpSpPr>
         <p:sp>
@@ -29551,8 +29529,8 @@
           </p:nvSpPr>
           <p:spPr>
             <a:xfrm flipH="false" flipV="false" rot="0">
-              <a:off x="63500" y="63500"/>
-              <a:ext cx="17373600" cy="1499616"/>
+              <a:off x="63500" y="87256"/>
+              <a:ext cx="17373600" cy="2060632"/>
             </a:xfrm>
             <a:custGeom>
               <a:avLst/>
@@ -29561,15 +29539,15 @@
               <a:cxnLst/>
               <a:rect r="r" b="b" t="t" l="l"/>
               <a:pathLst>
-                <a:path h="1499616" w="17373600">
+                <a:path h="2060632" w="17373600">
                   <a:moveTo>
                     <a:pt x="0" y="0"/>
                   </a:moveTo>
                   <a:lnTo>
-                    <a:pt x="0" y="1499616"/>
-                  </a:lnTo>
-                  <a:lnTo>
-                    <a:pt x="17373600" y="1499616"/>
+                    <a:pt x="0" y="2060632"/>
+                  </a:lnTo>
+                  <a:lnTo>
+                    <a:pt x="17373600" y="2060632"/>
                   </a:lnTo>
                   <a:lnTo>
                     <a:pt x="17373600" y="0"/>
@@ -29591,8 +29569,8 @@
           </p:nvSpPr>
           <p:spPr>
             <a:xfrm flipH="false" flipV="false" rot="0">
-              <a:off x="63500" y="63500"/>
-              <a:ext cx="128016" cy="1499616"/>
+              <a:off x="63500" y="87256"/>
+              <a:ext cx="128016" cy="2060632"/>
             </a:xfrm>
             <a:custGeom>
               <a:avLst/>
@@ -29601,15 +29579,15 @@
               <a:cxnLst/>
               <a:rect r="r" b="b" t="t" l="l"/>
               <a:pathLst>
-                <a:path h="1499616" w="128016">
+                <a:path h="2060632" w="128016">
                   <a:moveTo>
                     <a:pt x="0" y="0"/>
                   </a:moveTo>
                   <a:lnTo>
-                    <a:pt x="0" y="1499616"/>
-                  </a:lnTo>
-                  <a:lnTo>
-                    <a:pt x="128016" y="1499616"/>
+                    <a:pt x="0" y="2060632"/>
+                  </a:lnTo>
+                  <a:lnTo>
+                    <a:pt x="128016" y="2060632"/>
                   </a:lnTo>
                   <a:lnTo>
                     <a:pt x="128016" y="0"/>
@@ -29631,8 +29609,8 @@
           </p:nvSpPr>
           <p:spPr>
             <a:xfrm flipH="false" flipV="false" rot="0">
-              <a:off x="63500" y="63500"/>
-              <a:ext cx="17373600" cy="1499616"/>
+              <a:off x="63500" y="87256"/>
+              <a:ext cx="17373600" cy="2060632"/>
             </a:xfrm>
             <a:custGeom>
               <a:avLst/>
@@ -29641,12 +29619,12 @@
               <a:cxnLst/>
               <a:rect r="r" b="b" t="t" l="l"/>
               <a:pathLst>
-                <a:path h="1499616" w="17373600">
+                <a:path h="2060632" w="17373600">
                   <a:moveTo>
-                    <a:pt x="0" y="1499616"/>
+                    <a:pt x="0" y="2060632"/>
                   </a:moveTo>
                   <a:lnTo>
-                    <a:pt x="17373600" y="1499616"/>
+                    <a:pt x="17373600" y="2060632"/>
                   </a:lnTo>
                   <a:lnTo>
                     <a:pt x="17373600" y="0"/>
@@ -29673,8 +29651,8 @@
           </p:nvSpPr>
           <p:spPr>
             <a:xfrm flipH="false" flipV="false" rot="0">
-              <a:off x="63500" y="63500"/>
-              <a:ext cx="128016" cy="1499616"/>
+              <a:off x="63500" y="87256"/>
+              <a:ext cx="128016" cy="2060632"/>
             </a:xfrm>
             <a:custGeom>
               <a:avLst/>
@@ -29683,12 +29661,12 @@
               <a:cxnLst/>
               <a:rect r="r" b="b" t="t" l="l"/>
               <a:pathLst>
-                <a:path h="1499616" w="128016">
+                <a:path h="2060632" w="128016">
                   <a:moveTo>
-                    <a:pt x="0" y="1499616"/>
+                    <a:pt x="0" y="2060632"/>
                   </a:moveTo>
                   <a:lnTo>
-                    <a:pt x="128016" y="1499616"/>
+                    <a:pt x="128016" y="2060632"/>
                   </a:lnTo>
                   <a:lnTo>
                     <a:pt x="128016" y="0"/>
@@ -29717,9 +29695,9 @@
         <p:grpSpPr>
           <a:xfrm rot="0">
             <a:off x="9354817" y="1490977"/>
-            <a:ext cx="8630917" cy="6710677"/>
+            <a:ext cx="8630917" cy="5974773"/>
             <a:chOff x="0" y="0"/>
-            <a:chExt cx="8630920" cy="6710680"/>
+            <a:chExt cx="8630920" cy="5974776"/>
           </a:xfrm>
         </p:grpSpPr>
         <p:sp>
@@ -29730,8 +29708,8 @@
           </p:nvSpPr>
           <p:spPr>
             <a:xfrm flipH="false" flipV="false" rot="0">
-              <a:off x="63500" y="63500"/>
-              <a:ext cx="8503920" cy="6583680"/>
+              <a:off x="63500" y="56536"/>
+              <a:ext cx="8503920" cy="5861703"/>
             </a:xfrm>
             <a:custGeom>
               <a:avLst/>
@@ -29740,15 +29718,15 @@
               <a:cxnLst/>
               <a:rect r="r" b="b" t="t" l="l"/>
               <a:pathLst>
-                <a:path h="6583680" w="8503920">
+                <a:path h="5861703" w="8503920">
                   <a:moveTo>
                     <a:pt x="0" y="0"/>
                   </a:moveTo>
                   <a:lnTo>
-                    <a:pt x="0" y="6583680"/>
-                  </a:lnTo>
-                  <a:lnTo>
-                    <a:pt x="8503920" y="6583680"/>
+                    <a:pt x="0" y="5861703"/>
+                  </a:lnTo>
+                  <a:lnTo>
+                    <a:pt x="8503920" y="5861703"/>
                   </a:lnTo>
                   <a:lnTo>
                     <a:pt x="8503920" y="0"/>
@@ -29770,8 +29748,8 @@
           </p:nvSpPr>
           <p:spPr>
             <a:xfrm flipH="false" flipV="false" rot="0">
-              <a:off x="63500" y="63500"/>
-              <a:ext cx="8502142" cy="1060704"/>
+              <a:off x="63500" y="56536"/>
+              <a:ext cx="8502142" cy="944385"/>
             </a:xfrm>
             <a:custGeom>
               <a:avLst/>
@@ -29780,15 +29758,15 @@
               <a:cxnLst/>
               <a:rect r="r" b="b" t="t" l="l"/>
               <a:pathLst>
-                <a:path h="1060704" w="8502142">
+                <a:path h="944385" w="8502142">
                   <a:moveTo>
                     <a:pt x="0" y="0"/>
                   </a:moveTo>
                   <a:lnTo>
-                    <a:pt x="0" y="1060704"/>
-                  </a:lnTo>
-                  <a:lnTo>
-                    <a:pt x="8502142" y="1060704"/>
+                    <a:pt x="0" y="944386"/>
+                  </a:lnTo>
+                  <a:lnTo>
+                    <a:pt x="8502142" y="944386"/>
                   </a:lnTo>
                   <a:lnTo>
                     <a:pt x="8502142" y="0"/>
@@ -29810,8 +29788,8 @@
           </p:nvSpPr>
           <p:spPr>
             <a:xfrm flipH="false" flipV="false" rot="0">
-              <a:off x="63500" y="63500"/>
-              <a:ext cx="8503920" cy="6583680"/>
+              <a:off x="63500" y="56536"/>
+              <a:ext cx="8503920" cy="5861703"/>
             </a:xfrm>
             <a:custGeom>
               <a:avLst/>
@@ -29820,12 +29798,12 @@
               <a:cxnLst/>
               <a:rect r="r" b="b" t="t" l="l"/>
               <a:pathLst>
-                <a:path h="6583680" w="8503920">
+                <a:path h="5861703" w="8503920">
                   <a:moveTo>
-                    <a:pt x="0" y="6583680"/>
+                    <a:pt x="0" y="5861703"/>
                   </a:moveTo>
                   <a:lnTo>
-                    <a:pt x="8503920" y="6583680"/>
+                    <a:pt x="8503920" y="5861703"/>
                   </a:lnTo>
                   <a:lnTo>
                     <a:pt x="8503920" y="0"/>
@@ -29852,8 +29830,8 @@
           </p:nvSpPr>
           <p:spPr>
             <a:xfrm flipH="false" flipV="false" rot="0">
-              <a:off x="63500" y="63500"/>
-              <a:ext cx="8503920" cy="1060704"/>
+              <a:off x="63500" y="56536"/>
+              <a:ext cx="8503920" cy="944385"/>
             </a:xfrm>
             <a:custGeom>
               <a:avLst/>
@@ -29862,12 +29840,12 @@
               <a:cxnLst/>
               <a:rect r="r" b="b" t="t" l="l"/>
               <a:pathLst>
-                <a:path h="1060704" w="8503920">
+                <a:path h="944385" w="8503920">
                   <a:moveTo>
-                    <a:pt x="0" y="1060704"/>
+                    <a:pt x="0" y="944386"/>
                   </a:moveTo>
                   <a:lnTo>
-                    <a:pt x="8503920" y="1060704"/>
+                    <a:pt x="8503920" y="944386"/>
                   </a:lnTo>
                   <a:lnTo>
                     <a:pt x="8503920" y="0"/>
@@ -30018,7 +29996,7 @@
         </p:nvSpPr>
         <p:spPr>
           <a:xfrm rot="0">
-            <a:off x="786384" y="4561999"/>
+            <a:off x="786384" y="4219718"/>
             <a:ext cx="6522549" cy="1281827"/>
           </a:xfrm>
           <a:prstGeom prst="rect">
@@ -30085,7 +30063,7 @@
         </p:nvSpPr>
         <p:spPr>
           <a:xfrm rot="0">
-            <a:off x="786384" y="2879503"/>
+            <a:off x="786384" y="2751706"/>
             <a:ext cx="7253668" cy="1281827"/>
           </a:xfrm>
           <a:prstGeom prst="rect">
@@ -30152,7 +30130,7 @@
         </p:nvSpPr>
         <p:spPr>
           <a:xfrm rot="0">
-            <a:off x="786384" y="6244495"/>
+            <a:off x="786384" y="5796201"/>
             <a:ext cx="7382237" cy="1281827"/>
           </a:xfrm>
           <a:prstGeom prst="rect">
@@ -30219,7 +30197,7 @@
         </p:nvSpPr>
         <p:spPr>
           <a:xfrm rot="0">
-            <a:off x="9747504" y="2879503"/>
+            <a:off x="9747504" y="2751706"/>
             <a:ext cx="7274538" cy="1281827"/>
           </a:xfrm>
           <a:prstGeom prst="rect">
@@ -30286,8 +30264,8 @@
         </p:nvSpPr>
         <p:spPr>
           <a:xfrm rot="0">
-            <a:off x="9747504" y="6187345"/>
-            <a:ext cx="7486298" cy="1500902"/>
+            <a:off x="9641624" y="5739051"/>
+            <a:ext cx="7486298" cy="1498178"/>
           </a:xfrm>
           <a:prstGeom prst="rect">
             <a:avLst/>
@@ -30352,7 +30330,7 @@
                 <a:cs typeface="Calibri (MS)"/>
                 <a:sym typeface="Calibri (MS)"/>
               </a:rPr>
-              <a:t>nivoe. Svaki sloj koji ga uhvati (kešira) sprecava ponavljanje</a:t>
+              <a:t>nivoe. Svaki sloj koji ga uhvati (kešira) sprečava ponavljanje</a:t>
             </a:r>
           </a:p>
           <a:p>
@@ -30384,8 +30362,8 @@
         </p:nvSpPr>
         <p:spPr>
           <a:xfrm rot="0">
-            <a:off x="822960" y="9031567"/>
-            <a:ext cx="16668579" cy="702269"/>
+            <a:off x="791423" y="8187745"/>
+            <a:ext cx="16790487" cy="1679871"/>
           </a:xfrm>
           <a:prstGeom prst="rect">
             <a:avLst/>
@@ -30399,11 +30377,11 @@
           <a:p>
             <a:pPr algn="l">
               <a:lnSpc>
-                <a:spcPts val="2624"/>
-              </a:lnSpc>
-            </a:pPr>
-            <a:r>
-              <a:rPr lang="en-US" sz="2199">
+                <a:spcPts val="4431"/>
+              </a:lnSpc>
+            </a:pPr>
+            <a:r>
+              <a:rPr lang="en-US" sz="2215">
                 <a:solidFill>
                   <a:srgbClr val="E8F4F8"/>
                 </a:solidFill>
@@ -30412,7 +30390,45 @@
                 <a:cs typeface="Calibri (MS)"/>
                 <a:sym typeface="Calibri (MS)"/>
               </a:rPr>
-              <a:t>Stranica u shared_buffers → DBMS je opsluži direktno (najbrže). Stranica samo u OS cache → OS je prosledi, ali PostgreSQL mora da je smesti i u shared_buffers. Nije ni u jednom kešu → fizicki disk pristup (najsporije).</a:t>
+              <a:t>Stranica u shared_buffers → DBMS je opsluži direktno (najbrže). </a:t>
+            </a:r>
+          </a:p>
+          <a:p>
+            <a:pPr algn="l">
+              <a:lnSpc>
+                <a:spcPts val="4431"/>
+              </a:lnSpc>
+            </a:pPr>
+            <a:r>
+              <a:rPr lang="en-US" sz="2215">
+                <a:solidFill>
+                  <a:srgbClr val="E8F4F8"/>
+                </a:solidFill>
+                <a:latin typeface="Calibri (MS)"/>
+                <a:ea typeface="Calibri (MS)"/>
+                <a:cs typeface="Calibri (MS)"/>
+                <a:sym typeface="Calibri (MS)"/>
+              </a:rPr>
+              <a:t>Stranica samo u OS cache → OS je prosledi, ali PostgreSQL mora da je smesti i u shared_buffers. </a:t>
+            </a:r>
+          </a:p>
+          <a:p>
+            <a:pPr algn="l">
+              <a:lnSpc>
+                <a:spcPts val="4431"/>
+              </a:lnSpc>
+            </a:pPr>
+            <a:r>
+              <a:rPr lang="en-US" sz="2215">
+                <a:solidFill>
+                  <a:srgbClr val="E8F4F8"/>
+                </a:solidFill>
+                <a:latin typeface="Calibri (MS)"/>
+                <a:ea typeface="Calibri (MS)"/>
+                <a:cs typeface="Calibri (MS)"/>
+                <a:sym typeface="Calibri (MS)"/>
+              </a:rPr>
+              <a:t>Nije ni u jednom kešu → fizički disk pristup (najsporije).</a:t>
             </a:r>
           </a:p>
         </p:txBody>
@@ -30425,8 +30441,8 @@
         </p:nvSpPr>
         <p:spPr>
           <a:xfrm rot="0">
-            <a:off x="9747504" y="4561999"/>
-            <a:ext cx="7607056" cy="1281827"/>
+            <a:off x="9692640" y="4219718"/>
+            <a:ext cx="7607056" cy="1344981"/>
           </a:xfrm>
           <a:prstGeom prst="rect">
             <a:avLst/>
@@ -30479,7 +30495,7 @@
                 <a:cs typeface="Calibri (MS)"/>
                 <a:sym typeface="Calibri (MS)"/>
               </a:rPr>
-              <a:t>Najsporiji nivo, latencija ~10 ms. Sekvencijalni pristup znatno bolji od nasumicnog zbog mehanickih ogranicenja.</a:t>
+              <a:t>Najsporiji nivo, latencija ~10 ms. Sekvencijalni pristup znatno bolji od nasumicnog zbog mehaničkih ograničenja.</a:t>
             </a:r>
           </a:p>
         </p:txBody>
@@ -30492,7 +30508,7 @@
         </p:nvSpPr>
         <p:spPr>
           <a:xfrm rot="0">
-            <a:off x="822960" y="8475459"/>
+            <a:off x="731520" y="7856275"/>
             <a:ext cx="4574181" cy="436245"/>
           </a:xfrm>
           <a:prstGeom prst="rect">
@@ -32250,7 +32266,7 @@
         </p:nvSpPr>
         <p:spPr>
           <a:xfrm rot="0">
-            <a:off x="1028700" y="2953245"/>
+            <a:off x="877824" y="2974657"/>
             <a:ext cx="1544460" cy="436245"/>
           </a:xfrm>
           <a:prstGeom prst="rect">
@@ -32292,7 +32308,7 @@
         <p:spPr>
           <a:xfrm rot="0">
             <a:off x="877824" y="8249526"/>
-            <a:ext cx="6780828" cy="1164279"/>
+            <a:ext cx="6780828" cy="1049795"/>
           </a:xfrm>
           <a:prstGeom prst="rect">
             <a:avLst/>
@@ -32338,7 +32354,26 @@
                 <a:cs typeface="Calibri (MS)"/>
                 <a:sym typeface="Calibri (MS)"/>
               </a:rPr>
-              <a:t>SELECT pg_prewarm('customers'); -- cela tabela | SELECT pg_prewarm('idx_value'); -- indeks</a:t>
+              <a:t>SELECT pg_prewarm('customers'); -- cela tabela |</a:t>
+            </a:r>
+          </a:p>
+          <a:p>
+            <a:pPr algn="l">
+              <a:lnSpc>
+                <a:spcPts val="2624"/>
+              </a:lnSpc>
+            </a:pPr>
+            <a:r>
+              <a:rPr lang="en-US" sz="2199">
+                <a:solidFill>
+                  <a:srgbClr val="E8F4F8"/>
+                </a:solidFill>
+                <a:latin typeface="Calibri (MS)"/>
+                <a:ea typeface="Calibri (MS)"/>
+                <a:cs typeface="Calibri (MS)"/>
+                <a:sym typeface="Calibri (MS)"/>
+              </a:rPr>
+              <a:t>SELECT pg_prewarm('idx_value'); -- indeks</a:t>
             </a:r>
           </a:p>
         </p:txBody>
